--- a/dist/초1/환경·생태/자연만나기/초1_환경·생태_자연만나기_01_주변생물관찰과보호_학생용.pptx
+++ b/dist/초1/환경·생태/자연만나기/초1_환경·생태_자연만나기_01_주변생물관찰과보호_학생용.pptx
@@ -114,34 +114,34 @@
   <p:extLst>
     <p:ext uri="{521415D9-36F7-43E2-AB2F-B90AF26B5E84}">
       <p14:sectionLst xmlns:p14="http://schemas.microsoft.com/office/powerpoint/2010/main">
-        <p14:section name="도입" id="{c13846b3-9b90-3c8e-7509-5604cdb4645d}">
+        <p14:section name="도입" id="{34fcfe07-70b0-af49-bf4b-6adf8acba1ca}">
           <p14:sldIdLst>
             <p14:sldId id="256"/>
             <p14:sldId id="257"/>
           </p14:sldIdLst>
         </p14:section>
-        <p14:section name="개념" id="{e77ec2ab-398f-3383-12a1-11edc42dc1f8}">
+        <p14:section name="개념" id="{87cdc382-b912-59f2-4d82-bb7fda401e4b}">
           <p14:sldIdLst>
             <p14:sldId id="258"/>
           </p14:sldIdLst>
         </p14:section>
-        <p14:section name="연습" id="{2f5e0599-e8dc-c590-3f56-8eaeb8400c3e}">
+        <p14:section name="연습" id="{9a35f1c5-3c70-551e-6138-61f8faebc295}">
           <p14:sldIdLst>
             <p14:sldId id="259"/>
             <p14:sldId id="260"/>
           </p14:sldIdLst>
         </p14:section>
-        <p14:section name="확인" id="{c63bfaf5-5429-5ac8-e319-69a471d84e58}">
+        <p14:section name="확인" id="{5efd768a-a9bf-418f-0450-f79ba2284d19}">
           <p14:sldIdLst>
             <p14:sldId id="261"/>
           </p14:sldIdLst>
         </p14:section>
-        <p14:section name="정리" id="{9690d1ff-109e-9c99-3b2f-804bb3f745f2}">
+        <p14:section name="정리" id="{153e303d-c38d-2267-306e-37dc775c175f}">
           <p14:sldIdLst>
             <p14:sldId id="262"/>
           </p14:sldIdLst>
         </p14:section>
-        <p14:section name="보충" id="{25970af1-c186-a2ca-dac6-59605432b10d}">
+        <p14:section name="보충" id="{372403dc-2981-9492-15a2-a75aab28fb94}">
           <p14:sldIdLst>
             <p14:sldId id="263"/>
           </p14:sldIdLst>
